--- a/presentation/best_time_to_call_one_slide.pptx
+++ b/presentation/best_time_to_call_one_slide.pptx
@@ -3130,7 +3130,7 @@
                 </a:solidFill>
                 <a:latin typeface="Cambria"/>
               </a:rPr>
-              <a:t>Best Time to Call: replace the fixed 15-minute redial</a:t>
+              <a:t>VANI Pulse: replace the fixed 15-minute redial</a:t>
             </a:r>
           </a:p>
         </p:txBody>
